--- a/examples/deckforge-demo/deckforge-demo.pptx
+++ b/examples/deckforge-demo/deckforge-demo.pptx
@@ -3117,8 +3117,8 @@
           <a:noFill/>
         </p:spPr>
         <p:txBody>
-          <a:bodyPr wrap="none" lIns="0" rIns="0" tIns="0" bIns="0">
-            <a:spAutoFit/>
+          <a:bodyPr wrap="square" lIns="0" rIns="0" tIns="0" bIns="0">
+            <a:normAutofit/>
           </a:bodyPr>
           <a:lstStyle/>
           <a:p>
@@ -3153,8 +3153,8 @@
           <a:noFill/>
         </p:spPr>
         <p:txBody>
-          <a:bodyPr wrap="none" lIns="0" rIns="0" tIns="0" bIns="0">
-            <a:spAutoFit/>
+          <a:bodyPr wrap="square" lIns="0" rIns="0" tIns="0" bIns="0">
+            <a:normAutofit/>
           </a:bodyPr>
           <a:lstStyle/>
           <a:p>
@@ -3185,7 +3185,7 @@
         <p:spPr>
           <a:xfrm>
             <a:off x="723899" y="3028950"/>
-            <a:ext cx="6095999" cy="761999"/>
+            <a:ext cx="5905499" cy="876299"/>
           </a:xfrm>
           <a:prstGeom prst="rect">
             <a:avLst/>
@@ -3193,8 +3193,8 @@
           <a:noFill/>
         </p:spPr>
         <p:txBody>
-          <a:bodyPr wrap="none" lIns="0" rIns="0" tIns="0" bIns="0">
-            <a:spAutoFit/>
+          <a:bodyPr wrap="square" lIns="0" rIns="0" tIns="0" bIns="0">
+            <a:normAutofit/>
           </a:bodyPr>
           <a:lstStyle/>
           <a:p>
@@ -3207,7 +3207,15 @@
               </a:defRPr>
             </a:pPr>
             <a:r>
-              <a:t>A Codex plugin workflow for turning screenshots, generated slide art, and frontend slide canvases into polished PowerPoint files with a visual QA loop.</a:t>
+              <a:t>Turn screenshots, generated slide art,</a:t>
+            </a:r>
+            <a:br/>
+            <a:r>
+              <a:t>and frontend slide canvases into</a:t>
+            </a:r>
+            <a:br/>
+            <a:r>
+              <a:t>editable PowerPoint files.</a:t>
             </a:r>
           </a:p>
         </p:txBody>
@@ -3274,8 +3282,8 @@
           <a:noFill/>
         </p:spPr>
         <p:txBody>
-          <a:bodyPr wrap="none" lIns="0" rIns="0" tIns="0" bIns="0">
-            <a:spAutoFit/>
+          <a:bodyPr wrap="square" lIns="0" rIns="0" tIns="0" bIns="0">
+            <a:normAutofit/>
           </a:bodyPr>
           <a:lstStyle/>
           <a:p>
@@ -3310,8 +3318,8 @@
           <a:noFill/>
         </p:spPr>
         <p:txBody>
-          <a:bodyPr wrap="none" lIns="0" rIns="0" tIns="0" bIns="0">
-            <a:spAutoFit/>
+          <a:bodyPr wrap="square" lIns="0" rIns="0" tIns="0" bIns="0">
+            <a:normAutofit/>
           </a:bodyPr>
           <a:lstStyle/>
           <a:p>
@@ -3324,7 +3332,11 @@
               </a:defRPr>
             </a:pPr>
             <a:r>
-              <a:t>Clarify intent, style, fidelity, and which screenshots stay blank.</a:t>
+              <a:t>Clarify intent, style,</a:t>
+            </a:r>
+            <a:br/>
+            <a:r>
+              <a:t>and fidelity.</a:t>
             </a:r>
           </a:p>
         </p:txBody>
@@ -3391,8 +3403,8 @@
           <a:noFill/>
         </p:spPr>
         <p:txBody>
-          <a:bodyPr wrap="none" lIns="0" rIns="0" tIns="0" bIns="0">
-            <a:spAutoFit/>
+          <a:bodyPr wrap="square" lIns="0" rIns="0" tIns="0" bIns="0">
+            <a:normAutofit/>
           </a:bodyPr>
           <a:lstStyle/>
           <a:p>
@@ -3427,8 +3439,8 @@
           <a:noFill/>
         </p:spPr>
         <p:txBody>
-          <a:bodyPr wrap="none" lIns="0" rIns="0" tIns="0" bIns="0">
-            <a:spAutoFit/>
+          <a:bodyPr wrap="square" lIns="0" rIns="0" tIns="0" bIns="0">
+            <a:normAutofit/>
           </a:bodyPr>
           <a:lstStyle/>
           <a:p>
@@ -3441,7 +3453,11 @@
               </a:defRPr>
             </a:pPr>
             <a:r>
-              <a:t>Use shapes, text boxes, cards, lines, and cropped image assets.</a:t>
+              <a:t>Use shapes, text,</a:t>
+            </a:r>
+            <a:br/>
+            <a:r>
+              <a:t>cards, and crops.</a:t>
             </a:r>
           </a:p>
         </p:txBody>
@@ -3508,8 +3524,8 @@
           <a:noFill/>
         </p:spPr>
         <p:txBody>
-          <a:bodyPr wrap="none" lIns="0" rIns="0" tIns="0" bIns="0">
-            <a:spAutoFit/>
+          <a:bodyPr wrap="square" lIns="0" rIns="0" tIns="0" bIns="0">
+            <a:normAutofit/>
           </a:bodyPr>
           <a:lstStyle/>
           <a:p>
@@ -3544,8 +3560,8 @@
           <a:noFill/>
         </p:spPr>
         <p:txBody>
-          <a:bodyPr wrap="none" lIns="0" rIns="0" tIns="0" bIns="0">
-            <a:spAutoFit/>
+          <a:bodyPr wrap="square" lIns="0" rIns="0" tIns="0" bIns="0">
+            <a:normAutofit/>
           </a:bodyPr>
           <a:lstStyle/>
           <a:p>
@@ -3558,7 +3574,11 @@
               </a:defRPr>
             </a:pPr>
             <a:r>
-              <a:t>Export slide images, inspect layout, and fix visual defects.</a:t>
+              <a:t>Render images,</a:t>
+            </a:r>
+            <a:br/>
+            <a:r>
+              <a:t>inspect, then fix.</a:t>
             </a:r>
           </a:p>
         </p:txBody>
@@ -3623,8 +3643,8 @@
           <a:noFill/>
         </p:spPr>
         <p:txBody>
-          <a:bodyPr wrap="none" lIns="0" rIns="0" tIns="0" bIns="0">
-            <a:spAutoFit/>
+          <a:bodyPr wrap="square" lIns="0" rIns="0" tIns="0" bIns="0">
+            <a:normAutofit/>
           </a:bodyPr>
           <a:lstStyle/>
           <a:p>
@@ -3685,8 +3705,8 @@
           <a:noFill/>
         </p:spPr>
         <p:txBody>
-          <a:bodyPr wrap="none" lIns="0" rIns="0" tIns="0" bIns="0">
-            <a:spAutoFit/>
+          <a:bodyPr wrap="square" lIns="0" rIns="0" tIns="0" bIns="0">
+            <a:normAutofit/>
           </a:bodyPr>
           <a:lstStyle/>
           <a:p>
@@ -3721,8 +3741,8 @@
           <a:noFill/>
         </p:spPr>
         <p:txBody>
-          <a:bodyPr wrap="none" lIns="0" rIns="0" tIns="0" bIns="0">
-            <a:spAutoFit/>
+          <a:bodyPr wrap="square" lIns="0" rIns="0" tIns="0" bIns="0">
+            <a:normAutofit/>
           </a:bodyPr>
           <a:lstStyle/>
           <a:p>
@@ -3802,8 +3822,8 @@
           <a:noFill/>
         </p:spPr>
         <p:txBody>
-          <a:bodyPr wrap="none" lIns="0" rIns="0" tIns="0" bIns="0">
-            <a:spAutoFit/>
+          <a:bodyPr wrap="square" lIns="0" rIns="0" tIns="0" bIns="0">
+            <a:normAutofit/>
           </a:bodyPr>
           <a:lstStyle/>
           <a:p>
@@ -3838,8 +3858,8 @@
           <a:noFill/>
         </p:spPr>
         <p:txBody>
-          <a:bodyPr wrap="none" lIns="0" rIns="0" tIns="0" bIns="0">
-            <a:spAutoFit/>
+          <a:bodyPr wrap="square" lIns="0" rIns="0" tIns="0" bIns="0">
+            <a:normAutofit/>
           </a:bodyPr>
           <a:lstStyle/>
           <a:p>
@@ -3874,8 +3894,8 @@
           <a:noFill/>
         </p:spPr>
         <p:txBody>
-          <a:bodyPr wrap="none" lIns="0" rIns="0" tIns="0" bIns="0">
-            <a:spAutoFit/>
+          <a:bodyPr wrap="square" lIns="0" rIns="0" tIns="0" bIns="0">
+            <a:normAutofit/>
           </a:bodyPr>
           <a:lstStyle/>
           <a:p>
@@ -3888,7 +3908,15 @@
               </a:defRPr>
             </a:pPr>
             <a:r>
-              <a:t>Audience, source images, style target, and output format.</a:t>
+              <a:t>Audience</a:t>
+            </a:r>
+            <a:br/>
+            <a:r>
+              <a:t>Sources</a:t>
+            </a:r>
+            <a:br/>
+            <a:r>
+              <a:t>Style target</a:t>
             </a:r>
           </a:p>
         </p:txBody>
@@ -3998,8 +4026,8 @@
           <a:noFill/>
         </p:spPr>
         <p:txBody>
-          <a:bodyPr wrap="none" lIns="0" rIns="0" tIns="0" bIns="0">
-            <a:spAutoFit/>
+          <a:bodyPr wrap="square" lIns="0" rIns="0" tIns="0" bIns="0">
+            <a:normAutofit/>
           </a:bodyPr>
           <a:lstStyle/>
           <a:p>
@@ -4034,8 +4062,8 @@
           <a:noFill/>
         </p:spPr>
         <p:txBody>
-          <a:bodyPr wrap="none" lIns="0" rIns="0" tIns="0" bIns="0">
-            <a:spAutoFit/>
+          <a:bodyPr wrap="square" lIns="0" rIns="0" tIns="0" bIns="0">
+            <a:normAutofit/>
           </a:bodyPr>
           <a:lstStyle/>
           <a:p>
@@ -4070,8 +4098,8 @@
           <a:noFill/>
         </p:spPr>
         <p:txBody>
-          <a:bodyPr wrap="none" lIns="0" rIns="0" tIns="0" bIns="0">
-            <a:spAutoFit/>
+          <a:bodyPr wrap="square" lIns="0" rIns="0" tIns="0" bIns="0">
+            <a:normAutofit/>
           </a:bodyPr>
           <a:lstStyle/>
           <a:p>
@@ -4084,7 +4112,15 @@
               </a:defRPr>
             </a:pPr>
             <a:r>
-              <a:t>Use browser rendering for slide art and visual direction.</a:t>
+              <a:t>Browser render</a:t>
+            </a:r>
+            <a:br/>
+            <a:r>
+              <a:t>Visual direction</a:t>
+            </a:r>
+            <a:br/>
+            <a:r>
+              <a:t>Reference capture</a:t>
             </a:r>
           </a:p>
         </p:txBody>
@@ -4194,8 +4230,8 @@
           <a:noFill/>
         </p:spPr>
         <p:txBody>
-          <a:bodyPr wrap="none" lIns="0" rIns="0" tIns="0" bIns="0">
-            <a:spAutoFit/>
+          <a:bodyPr wrap="square" lIns="0" rIns="0" tIns="0" bIns="0">
+            <a:normAutofit/>
           </a:bodyPr>
           <a:lstStyle/>
           <a:p>
@@ -4230,8 +4266,8 @@
           <a:noFill/>
         </p:spPr>
         <p:txBody>
-          <a:bodyPr wrap="none" lIns="0" rIns="0" tIns="0" bIns="0">
-            <a:spAutoFit/>
+          <a:bodyPr wrap="square" lIns="0" rIns="0" tIns="0" bIns="0">
+            <a:normAutofit/>
           </a:bodyPr>
           <a:lstStyle/>
           <a:p>
@@ -4266,8 +4302,8 @@
           <a:noFill/>
         </p:spPr>
         <p:txBody>
-          <a:bodyPr wrap="none" lIns="0" rIns="0" tIns="0" bIns="0">
-            <a:spAutoFit/>
+          <a:bodyPr wrap="square" lIns="0" rIns="0" tIns="0" bIns="0">
+            <a:normAutofit/>
           </a:bodyPr>
           <a:lstStyle/>
           <a:p>
@@ -4280,7 +4316,15 @@
               </a:defRPr>
             </a:pPr>
             <a:r>
-              <a:t>Schema routes text, cards, lines, and image crops.</a:t>
+              <a:t>Text boxes</a:t>
+            </a:r>
+            <a:br/>
+            <a:r>
+              <a:t>Cards and lines</a:t>
+            </a:r>
+            <a:br/>
+            <a:r>
+              <a:t>Image crops</a:t>
             </a:r>
           </a:p>
         </p:txBody>
@@ -4390,8 +4434,8 @@
           <a:noFill/>
         </p:spPr>
         <p:txBody>
-          <a:bodyPr wrap="none" lIns="0" rIns="0" tIns="0" bIns="0">
-            <a:spAutoFit/>
+          <a:bodyPr wrap="square" lIns="0" rIns="0" tIns="0" bIns="0">
+            <a:normAutofit/>
           </a:bodyPr>
           <a:lstStyle/>
           <a:p>
@@ -4426,8 +4470,8 @@
           <a:noFill/>
         </p:spPr>
         <p:txBody>
-          <a:bodyPr wrap="none" lIns="0" rIns="0" tIns="0" bIns="0">
-            <a:spAutoFit/>
+          <a:bodyPr wrap="square" lIns="0" rIns="0" tIns="0" bIns="0">
+            <a:normAutofit/>
           </a:bodyPr>
           <a:lstStyle/>
           <a:p>
@@ -4462,8 +4506,8 @@
           <a:noFill/>
         </p:spPr>
         <p:txBody>
-          <a:bodyPr wrap="none" lIns="0" rIns="0" tIns="0" bIns="0">
-            <a:spAutoFit/>
+          <a:bodyPr wrap="square" lIns="0" rIns="0" tIns="0" bIns="0">
+            <a:normAutofit/>
           </a:bodyPr>
           <a:lstStyle/>
           <a:p>
@@ -4535,7 +4579,7 @@
         <p:spPr>
           <a:xfrm>
             <a:off x="1181099" y="5114925"/>
-            <a:ext cx="9048749" cy="342900"/>
+            <a:ext cx="8572499" cy="342900"/>
           </a:xfrm>
           <a:prstGeom prst="rect">
             <a:avLst/>
@@ -4543,8 +4587,8 @@
           <a:noFill/>
         </p:spPr>
         <p:txBody>
-          <a:bodyPr wrap="none" lIns="0" rIns="0" tIns="0" bIns="0">
-            <a:spAutoFit/>
+          <a:bodyPr wrap="square" lIns="0" rIns="0" tIns="0" bIns="0">
+            <a:normAutofit/>
           </a:bodyPr>
           <a:lstStyle/>
           <a:p>
@@ -4557,7 +4601,7 @@
               </a:defRPr>
             </a:pPr>
             <a:r>
-              <a:t>Design rule: every slide needs a visible structure, readable hierarchy, and enough whitespace to survive PowerPoint editing.</a:t>
+              <a:t>Design rule: readable hierarchy, visible structure, enough whitespace.</a:t>
             </a:r>
           </a:p>
         </p:txBody>
@@ -4605,8 +4649,8 @@
           <a:noFill/>
         </p:spPr>
         <p:txBody>
-          <a:bodyPr wrap="none" lIns="0" rIns="0" tIns="0" bIns="0">
-            <a:spAutoFit/>
+          <a:bodyPr wrap="square" lIns="0" rIns="0" tIns="0" bIns="0">
+            <a:normAutofit/>
           </a:bodyPr>
           <a:lstStyle/>
           <a:p>
@@ -4641,8 +4685,8 @@
           <a:noFill/>
         </p:spPr>
         <p:txBody>
-          <a:bodyPr wrap="none" lIns="0" rIns="0" tIns="0" bIns="0">
-            <a:spAutoFit/>
+          <a:bodyPr wrap="square" lIns="0" rIns="0" tIns="0" bIns="0">
+            <a:normAutofit/>
           </a:bodyPr>
           <a:lstStyle/>
           <a:p>
@@ -4655,7 +4699,7 @@
               </a:defRPr>
             </a:pPr>
             <a:r>
-              <a:t>Built from native PowerPoint text boxes, rounded rectangles, and shape bars.</a:t>
+              <a:t>Native text boxes, rounded rectangles, and shape bars.</a:t>
             </a:r>
           </a:p>
         </p:txBody>
@@ -4722,8 +4766,8 @@
           <a:noFill/>
         </p:spPr>
         <p:txBody>
-          <a:bodyPr wrap="none" lIns="0" rIns="0" tIns="0" bIns="0">
-            <a:spAutoFit/>
+          <a:bodyPr wrap="square" lIns="0" rIns="0" tIns="0" bIns="0">
+            <a:normAutofit/>
           </a:bodyPr>
           <a:lstStyle/>
           <a:p>
@@ -4803,8 +4847,8 @@
           <a:noFill/>
         </p:spPr>
         <p:txBody>
-          <a:bodyPr wrap="none" lIns="0" rIns="0" tIns="0" bIns="0">
-            <a:spAutoFit/>
+          <a:bodyPr wrap="square" lIns="0" rIns="0" tIns="0" bIns="0">
+            <a:normAutofit/>
           </a:bodyPr>
           <a:lstStyle/>
           <a:p>
@@ -4839,8 +4883,8 @@
           <a:noFill/>
         </p:spPr>
         <p:txBody>
-          <a:bodyPr wrap="none" lIns="0" rIns="0" tIns="0" bIns="0">
-            <a:spAutoFit/>
+          <a:bodyPr wrap="square" lIns="0" rIns="0" tIns="0" bIns="0">
+            <a:normAutofit/>
           </a:bodyPr>
           <a:lstStyle/>
           <a:p>
@@ -4920,8 +4964,8 @@
           <a:noFill/>
         </p:spPr>
         <p:txBody>
-          <a:bodyPr wrap="none" lIns="0" rIns="0" tIns="0" bIns="0">
-            <a:spAutoFit/>
+          <a:bodyPr wrap="square" lIns="0" rIns="0" tIns="0" bIns="0">
+            <a:normAutofit/>
           </a:bodyPr>
           <a:lstStyle/>
           <a:p>
@@ -4956,8 +5000,8 @@
           <a:noFill/>
         </p:spPr>
         <p:txBody>
-          <a:bodyPr wrap="none" lIns="0" rIns="0" tIns="0" bIns="0">
-            <a:spAutoFit/>
+          <a:bodyPr wrap="square" lIns="0" rIns="0" tIns="0" bIns="0">
+            <a:normAutofit/>
           </a:bodyPr>
           <a:lstStyle/>
           <a:p>
@@ -5037,8 +5081,8 @@
           <a:noFill/>
         </p:spPr>
         <p:txBody>
-          <a:bodyPr wrap="none" lIns="0" rIns="0" tIns="0" bIns="0">
-            <a:spAutoFit/>
+          <a:bodyPr wrap="square" lIns="0" rIns="0" tIns="0" bIns="0">
+            <a:normAutofit/>
           </a:bodyPr>
           <a:lstStyle/>
           <a:p>
@@ -5073,8 +5117,8 @@
           <a:noFill/>
         </p:spPr>
         <p:txBody>
-          <a:bodyPr wrap="none" lIns="0" rIns="0" tIns="0" bIns="0">
-            <a:spAutoFit/>
+          <a:bodyPr wrap="square" lIns="0" rIns="0" tIns="0" bIns="0">
+            <a:normAutofit/>
           </a:bodyPr>
           <a:lstStyle/>
           <a:p>
@@ -5154,8 +5198,8 @@
           <a:noFill/>
         </p:spPr>
         <p:txBody>
-          <a:bodyPr wrap="none" lIns="0" rIns="0" tIns="0" bIns="0">
-            <a:spAutoFit/>
+          <a:bodyPr wrap="square" lIns="0" rIns="0" tIns="0" bIns="0">
+            <a:normAutofit/>
           </a:bodyPr>
           <a:lstStyle/>
           <a:p>
@@ -5190,8 +5234,8 @@
           <a:noFill/>
         </p:spPr>
         <p:txBody>
-          <a:bodyPr wrap="none" lIns="0" rIns="0" tIns="0" bIns="0">
-            <a:spAutoFit/>
+          <a:bodyPr wrap="square" lIns="0" rIns="0" tIns="0" bIns="0">
+            <a:normAutofit/>
           </a:bodyPr>
           <a:lstStyle/>
           <a:p>
@@ -5271,8 +5315,8 @@
           <a:noFill/>
         </p:spPr>
         <p:txBody>
-          <a:bodyPr wrap="none" lIns="0" rIns="0" tIns="0" bIns="0">
-            <a:spAutoFit/>
+          <a:bodyPr wrap="square" lIns="0" rIns="0" tIns="0" bIns="0">
+            <a:normAutofit/>
           </a:bodyPr>
           <a:lstStyle/>
           <a:p>
@@ -5479,8 +5523,8 @@
           <a:noFill/>
         </p:spPr>
         <p:txBody>
-          <a:bodyPr wrap="none" lIns="0" rIns="0" tIns="0" bIns="0">
-            <a:spAutoFit/>
+          <a:bodyPr wrap="square" lIns="0" rIns="0" tIns="0" bIns="0">
+            <a:normAutofit/>
           </a:bodyPr>
           <a:lstStyle/>
           <a:p>
@@ -5541,8 +5585,8 @@
           <a:noFill/>
         </p:spPr>
         <p:txBody>
-          <a:bodyPr wrap="none" lIns="0" rIns="0" tIns="0" bIns="0">
-            <a:spAutoFit/>
+          <a:bodyPr wrap="square" lIns="0" rIns="0" tIns="0" bIns="0">
+            <a:normAutofit/>
           </a:bodyPr>
           <a:lstStyle/>
           <a:p>
@@ -5577,8 +5621,8 @@
           <a:noFill/>
         </p:spPr>
         <p:txBody>
-          <a:bodyPr wrap="none" lIns="0" rIns="0" tIns="0" bIns="0">
-            <a:spAutoFit/>
+          <a:bodyPr wrap="square" lIns="0" rIns="0" tIns="0" bIns="0">
+            <a:normAutofit/>
           </a:bodyPr>
           <a:lstStyle/>
           <a:p>
@@ -5658,8 +5702,8 @@
           <a:noFill/>
         </p:spPr>
         <p:txBody>
-          <a:bodyPr wrap="none" lIns="0" rIns="0" tIns="0" bIns="0">
-            <a:spAutoFit/>
+          <a:bodyPr wrap="square" lIns="0" rIns="0" tIns="0" bIns="0">
+            <a:normAutofit/>
           </a:bodyPr>
           <a:lstStyle/>
           <a:p>
@@ -5694,8 +5738,8 @@
           <a:noFill/>
         </p:spPr>
         <p:txBody>
-          <a:bodyPr wrap="none" lIns="0" rIns="0" tIns="0" bIns="0">
-            <a:spAutoFit/>
+          <a:bodyPr wrap="square" lIns="0" rIns="0" tIns="0" bIns="0">
+            <a:normAutofit/>
           </a:bodyPr>
           <a:lstStyle/>
           <a:p>
@@ -5730,8 +5774,8 @@
           <a:noFill/>
         </p:spPr>
         <p:txBody>
-          <a:bodyPr wrap="none" lIns="0" rIns="0" tIns="0" bIns="0">
-            <a:spAutoFit/>
+          <a:bodyPr wrap="square" lIns="0" rIns="0" tIns="0" bIns="0">
+            <a:normAutofit/>
           </a:bodyPr>
           <a:lstStyle/>
           <a:p>
@@ -5766,8 +5810,8 @@
           <a:noFill/>
         </p:spPr>
         <p:txBody>
-          <a:bodyPr wrap="none" lIns="0" rIns="0" tIns="0" bIns="0">
-            <a:spAutoFit/>
+          <a:bodyPr wrap="square" lIns="0" rIns="0" tIns="0" bIns="0">
+            <a:normAutofit/>
           </a:bodyPr>
           <a:lstStyle/>
           <a:p>
@@ -5890,8 +5934,8 @@
           <a:noFill/>
         </p:spPr>
         <p:txBody>
-          <a:bodyPr wrap="none" lIns="0" rIns="0" tIns="0" bIns="0">
-            <a:spAutoFit/>
+          <a:bodyPr wrap="square" lIns="0" rIns="0" tIns="0" bIns="0">
+            <a:normAutofit/>
           </a:bodyPr>
           <a:lstStyle/>
           <a:p>
@@ -5926,8 +5970,8 @@
           <a:noFill/>
         </p:spPr>
         <p:txBody>
-          <a:bodyPr wrap="none" lIns="0" rIns="0" tIns="0" bIns="0">
-            <a:spAutoFit/>
+          <a:bodyPr wrap="square" lIns="0" rIns="0" tIns="0" bIns="0">
+            <a:normAutofit/>
           </a:bodyPr>
           <a:lstStyle/>
           <a:p>
@@ -5962,8 +6006,8 @@
           <a:noFill/>
         </p:spPr>
         <p:txBody>
-          <a:bodyPr wrap="none" lIns="0" rIns="0" tIns="0" bIns="0">
-            <a:spAutoFit/>
+          <a:bodyPr wrap="square" lIns="0" rIns="0" tIns="0" bIns="0">
+            <a:normAutofit/>
           </a:bodyPr>
           <a:lstStyle/>
           <a:p>
@@ -5998,8 +6042,8 @@
           <a:noFill/>
         </p:spPr>
         <p:txBody>
-          <a:bodyPr wrap="none" lIns="0" rIns="0" tIns="0" bIns="0">
-            <a:spAutoFit/>
+          <a:bodyPr wrap="square" lIns="0" rIns="0" tIns="0" bIns="0">
+            <a:normAutofit/>
           </a:bodyPr>
           <a:lstStyle/>
           <a:p>
@@ -6122,8 +6166,8 @@
           <a:noFill/>
         </p:spPr>
         <p:txBody>
-          <a:bodyPr wrap="none" lIns="0" rIns="0" tIns="0" bIns="0">
-            <a:spAutoFit/>
+          <a:bodyPr wrap="square" lIns="0" rIns="0" tIns="0" bIns="0">
+            <a:normAutofit/>
           </a:bodyPr>
           <a:lstStyle/>
           <a:p>
@@ -6158,8 +6202,8 @@
           <a:noFill/>
         </p:spPr>
         <p:txBody>
-          <a:bodyPr wrap="none" lIns="0" rIns="0" tIns="0" bIns="0">
-            <a:spAutoFit/>
+          <a:bodyPr wrap="square" lIns="0" rIns="0" tIns="0" bIns="0">
+            <a:normAutofit/>
           </a:bodyPr>
           <a:lstStyle/>
           <a:p>
@@ -6194,8 +6238,8 @@
           <a:noFill/>
         </p:spPr>
         <p:txBody>
-          <a:bodyPr wrap="none" lIns="0" rIns="0" tIns="0" bIns="0">
-            <a:spAutoFit/>
+          <a:bodyPr wrap="square" lIns="0" rIns="0" tIns="0" bIns="0">
+            <a:normAutofit/>
           </a:bodyPr>
           <a:lstStyle/>
           <a:p>
@@ -6230,8 +6274,8 @@
           <a:noFill/>
         </p:spPr>
         <p:txBody>
-          <a:bodyPr wrap="none" lIns="0" rIns="0" tIns="0" bIns="0">
-            <a:spAutoFit/>
+          <a:bodyPr wrap="square" lIns="0" rIns="0" tIns="0" bIns="0">
+            <a:normAutofit/>
           </a:bodyPr>
           <a:lstStyle/>
           <a:p>
@@ -6301,7 +6345,7 @@
         <p:spPr>
           <a:xfrm>
             <a:off x="971549" y="5353049"/>
-            <a:ext cx="9334499" cy="400050"/>
+            <a:ext cx="8572499" cy="495299"/>
           </a:xfrm>
           <a:prstGeom prst="rect">
             <a:avLst/>
@@ -6309,13 +6353,13 @@
           <a:noFill/>
         </p:spPr>
         <p:txBody>
-          <a:bodyPr wrap="none" lIns="0" rIns="0" tIns="0" bIns="0">
-            <a:spAutoFit/>
+          <a:bodyPr wrap="square" lIns="0" rIns="0" tIns="0" bIns="0">
+            <a:normAutofit/>
           </a:bodyPr>
           <a:lstStyle/>
           <a:p>
             <a:pPr>
-              <a:defRPr sz="2200" b="1">
+              <a:defRPr sz="2000" b="1">
                 <a:solidFill>
                   <a:srgbClr val="F9FAFB"/>
                 </a:solidFill>
@@ -6323,7 +6367,11 @@
               </a:defRPr>
             </a:pPr>
             <a:r>
-              <a:t>No remote shell installer is required. Users can download ZIP, enable the plugin, or ask Codex to install it safely.</a:t>
+              <a:t>Download ZIP, enable the plugin,</a:t>
+            </a:r>
+            <a:br/>
+            <a:r>
+              <a:t>or ask Codex to install it safely.</a:t>
             </a:r>
           </a:p>
         </p:txBody>
@@ -6371,8 +6419,8 @@
           <a:noFill/>
         </p:spPr>
         <p:txBody>
-          <a:bodyPr wrap="none" lIns="0" rIns="0" tIns="0" bIns="0">
-            <a:spAutoFit/>
+          <a:bodyPr wrap="square" lIns="0" rIns="0" tIns="0" bIns="0">
+            <a:normAutofit/>
           </a:bodyPr>
           <a:lstStyle/>
           <a:p>
@@ -6407,8 +6455,8 @@
           <a:noFill/>
         </p:spPr>
         <p:txBody>
-          <a:bodyPr wrap="none" lIns="0" rIns="0" tIns="0" bIns="0">
-            <a:spAutoFit/>
+          <a:bodyPr wrap="square" lIns="0" rIns="0" tIns="0" bIns="0">
+            <a:normAutofit/>
           </a:bodyPr>
           <a:lstStyle/>
           <a:p>
@@ -6533,8 +6581,8 @@
           <a:noFill/>
         </p:spPr>
         <p:txBody>
-          <a:bodyPr wrap="none" lIns="0" rIns="0" tIns="0" bIns="0">
-            <a:spAutoFit/>
+          <a:bodyPr wrap="square" lIns="0" rIns="0" tIns="0" bIns="0">
+            <a:normAutofit/>
           </a:bodyPr>
           <a:lstStyle/>
           <a:p>
@@ -6569,8 +6617,8 @@
           <a:noFill/>
         </p:spPr>
         <p:txBody>
-          <a:bodyPr wrap="none" lIns="0" rIns="0" tIns="0" bIns="0">
-            <a:spAutoFit/>
+          <a:bodyPr wrap="square" lIns="0" rIns="0" tIns="0" bIns="0">
+            <a:normAutofit/>
           </a:bodyPr>
           <a:lstStyle/>
           <a:p>
@@ -6693,8 +6741,8 @@
           <a:noFill/>
         </p:spPr>
         <p:txBody>
-          <a:bodyPr wrap="none" lIns="0" rIns="0" tIns="0" bIns="0">
-            <a:spAutoFit/>
+          <a:bodyPr wrap="square" lIns="0" rIns="0" tIns="0" bIns="0">
+            <a:normAutofit/>
           </a:bodyPr>
           <a:lstStyle/>
           <a:p>
@@ -6729,8 +6777,8 @@
           <a:noFill/>
         </p:spPr>
         <p:txBody>
-          <a:bodyPr wrap="none" lIns="0" rIns="0" tIns="0" bIns="0">
-            <a:spAutoFit/>
+          <a:bodyPr wrap="square" lIns="0" rIns="0" tIns="0" bIns="0">
+            <a:normAutofit/>
           </a:bodyPr>
           <a:lstStyle/>
           <a:p>
@@ -6853,8 +6901,8 @@
           <a:noFill/>
         </p:spPr>
         <p:txBody>
-          <a:bodyPr wrap="none" lIns="0" rIns="0" tIns="0" bIns="0">
-            <a:spAutoFit/>
+          <a:bodyPr wrap="square" lIns="0" rIns="0" tIns="0" bIns="0">
+            <a:normAutofit/>
           </a:bodyPr>
           <a:lstStyle/>
           <a:p>
@@ -6889,8 +6937,8 @@
           <a:noFill/>
         </p:spPr>
         <p:txBody>
-          <a:bodyPr wrap="none" lIns="0" rIns="0" tIns="0" bIns="0">
-            <a:spAutoFit/>
+          <a:bodyPr wrap="square" lIns="0" rIns="0" tIns="0" bIns="0">
+            <a:normAutofit/>
           </a:bodyPr>
           <a:lstStyle/>
           <a:p>
@@ -6970,8 +7018,8 @@
           <a:noFill/>
         </p:spPr>
         <p:txBody>
-          <a:bodyPr wrap="none" lIns="0" rIns="0" tIns="0" bIns="0">
-            <a:spAutoFit/>
+          <a:bodyPr wrap="square" lIns="0" rIns="0" tIns="0" bIns="0">
+            <a:normAutofit/>
           </a:bodyPr>
           <a:lstStyle/>
           <a:p>
@@ -6984,7 +7032,7 @@
               </a:defRPr>
             </a:pPr>
             <a:r>
-              <a:t>Final deliverable: examples/deckforge-demo/deckforge-demo.pptx</a:t>
+              <a:t>Final deliverable: deckforge-demo.pptx</a:t>
             </a:r>
           </a:p>
         </p:txBody>
